--- a/index/designs/y8-l15/l3-jiu-across-the-road/l3-jiu-across-the-road.pptx
+++ b/index/designs/y8-l15/l3-jiu-across-the-road/l3-jiu-across-the-road.pptx
@@ -2983,8 +2983,8 @@
         </p:nvSpPr>
         <p:spPr>
           <a:xfrm>
-            <a:off x="507950" y="176213"/>
-            <a:ext cx="1203356" cy="180975"/>
+            <a:off x="507950" y="180975"/>
+            <a:ext cx="1086618" cy="171450"/>
           </a:xfrm>
           <a:prstGeom prst="rect">
             <a:avLst/>
@@ -3022,8 +3022,8 @@
         </p:nvSpPr>
         <p:spPr>
           <a:xfrm>
-            <a:off x="1973163" y="166688"/>
-            <a:ext cx="1046390" cy="200025"/>
+            <a:off x="1858714" y="166688"/>
+            <a:ext cx="967451" cy="200025"/>
           </a:xfrm>
           <a:prstGeom prst="rect">
             <a:avLst/>
@@ -3061,8 +3061,8 @@
         </p:nvSpPr>
         <p:spPr>
           <a:xfrm>
-            <a:off x="11291292" y="176213"/>
-            <a:ext cx="400613" cy="180975"/>
+            <a:off x="11322397" y="180975"/>
+            <a:ext cx="368885" cy="171450"/>
           </a:xfrm>
           <a:prstGeom prst="rect">
             <a:avLst/>
@@ -4498,8 +4498,8 @@
         </p:nvSpPr>
         <p:spPr>
           <a:xfrm>
-            <a:off x="507950" y="180975"/>
-            <a:ext cx="1264837" cy="171450"/>
+            <a:off x="507950" y="176213"/>
+            <a:ext cx="1371404" cy="180975"/>
           </a:xfrm>
           <a:prstGeom prst="rect">
             <a:avLst/>
@@ -4537,8 +4537,8 @@
         </p:nvSpPr>
         <p:spPr>
           <a:xfrm>
-            <a:off x="2033439" y="166688"/>
-            <a:ext cx="1571330" cy="200025"/>
+            <a:off x="2137916" y="166688"/>
+            <a:ext cx="1670307" cy="200025"/>
           </a:xfrm>
           <a:prstGeom prst="rect">
             <a:avLst/>
@@ -4576,8 +4576,8 @@
         </p:nvSpPr>
         <p:spPr>
           <a:xfrm>
-            <a:off x="11244709" y="180975"/>
-            <a:ext cx="448127" cy="171450"/>
+            <a:off x="11208395" y="176213"/>
+            <a:ext cx="485168" cy="180975"/>
           </a:xfrm>
           <a:prstGeom prst="rect">
             <a:avLst/>
@@ -4645,7 +4645,7 @@
         </p:nvSpPr>
         <p:spPr>
           <a:xfrm>
-            <a:off x="609600" y="883146"/>
+            <a:off x="609600" y="892671"/>
             <a:ext cx="11192256" cy="200025"/>
           </a:xfrm>
           <a:prstGeom prst="rect">
@@ -4695,12 +4695,12 @@
         </p:nvSpPr>
         <p:spPr>
           <a:xfrm>
-            <a:off x="609600" y="1083171"/>
-            <a:ext cx="10972800" cy="990600"/>
+            <a:off x="609600" y="1092696"/>
+            <a:ext cx="10972800" cy="971550"/>
           </a:xfrm>
           <a:prstGeom prst="roundRect">
             <a:avLst>
-              <a:gd name="adj" fmla="val 11538"/>
+              <a:gd name="adj" fmla="val 11765"/>
             </a:avLst>
           </a:prstGeom>
           <a:solidFill>
@@ -4731,8 +4731,8 @@
         </p:nvSpPr>
         <p:spPr>
           <a:xfrm>
-            <a:off x="830199" y="1292721"/>
-            <a:ext cx="10531602" cy="571500"/>
+            <a:off x="830199" y="1302246"/>
+            <a:ext cx="10531602" cy="552450"/>
           </a:xfrm>
           <a:prstGeom prst="rect">
             <a:avLst/>
@@ -4770,7 +4770,7 @@
         </p:nvSpPr>
         <p:spPr>
           <a:xfrm>
-            <a:off x="609600" y="2200721"/>
+            <a:off x="609600" y="2191196"/>
             <a:ext cx="10972800" cy="1046411"/>
           </a:xfrm>
           <a:prstGeom prst="roundRect">
@@ -4806,7 +4806,7 @@
         </p:nvSpPr>
         <p:spPr>
           <a:xfrm>
-            <a:off x="822275" y="2362646"/>
+            <a:off x="822275" y="2353121"/>
             <a:ext cx="297841" cy="350490"/>
           </a:xfrm>
           <a:prstGeom prst="rect">
@@ -4848,8 +4848,8 @@
         </p:nvSpPr>
         <p:spPr>
           <a:xfrm>
-            <a:off x="1279327" y="2362646"/>
-            <a:ext cx="3926732" cy="400050"/>
+            <a:off x="1279327" y="2353121"/>
+            <a:ext cx="3978649" cy="400050"/>
           </a:xfrm>
           <a:prstGeom prst="rect">
             <a:avLst/>
@@ -4912,8 +4912,8 @@
         </p:nvSpPr>
         <p:spPr>
           <a:xfrm>
-            <a:off x="1279327" y="2800796"/>
-            <a:ext cx="3926732" cy="284411"/>
+            <a:off x="1279327" y="2791271"/>
+            <a:ext cx="3978649" cy="284411"/>
           </a:xfrm>
           <a:prstGeom prst="rect">
             <a:avLst/>
@@ -4979,7 +4979,7 @@
         </p:nvSpPr>
         <p:spPr>
           <a:xfrm>
-            <a:off x="609600" y="3399532"/>
+            <a:off x="609600" y="3390007"/>
             <a:ext cx="10972800" cy="1046411"/>
           </a:xfrm>
           <a:prstGeom prst="roundRect">
@@ -5015,7 +5015,7 @@
         </p:nvSpPr>
         <p:spPr>
           <a:xfrm>
-            <a:off x="822275" y="3561457"/>
+            <a:off x="822275" y="3551932"/>
             <a:ext cx="297841" cy="350490"/>
           </a:xfrm>
           <a:prstGeom prst="rect">
@@ -5057,8 +5057,8 @@
         </p:nvSpPr>
         <p:spPr>
           <a:xfrm>
-            <a:off x="1279327" y="3561457"/>
-            <a:ext cx="3311012" cy="400050"/>
+            <a:off x="1279327" y="3551932"/>
+            <a:ext cx="3483007" cy="400050"/>
           </a:xfrm>
           <a:prstGeom prst="rect">
             <a:avLst/>
@@ -5121,8 +5121,8 @@
         </p:nvSpPr>
         <p:spPr>
           <a:xfrm>
-            <a:off x="1279327" y="3999607"/>
-            <a:ext cx="3311012" cy="284411"/>
+            <a:off x="1279327" y="3990082"/>
+            <a:ext cx="3483007" cy="284411"/>
           </a:xfrm>
           <a:prstGeom prst="rect">
             <a:avLst/>
@@ -5188,7 +5188,7 @@
         </p:nvSpPr>
         <p:spPr>
           <a:xfrm>
-            <a:off x="609600" y="4598343"/>
+            <a:off x="609600" y="4588818"/>
             <a:ext cx="10972800" cy="1046411"/>
           </a:xfrm>
           <a:prstGeom prst="roundRect">
@@ -5224,7 +5224,7 @@
         </p:nvSpPr>
         <p:spPr>
           <a:xfrm>
-            <a:off x="822275" y="4760268"/>
+            <a:off x="822275" y="4750743"/>
             <a:ext cx="297841" cy="350490"/>
           </a:xfrm>
           <a:prstGeom prst="rect">
@@ -5266,8 +5266,8 @@
         </p:nvSpPr>
         <p:spPr>
           <a:xfrm>
-            <a:off x="1279327" y="4760268"/>
-            <a:ext cx="3694471" cy="400050"/>
+            <a:off x="1279327" y="4750743"/>
+            <a:ext cx="3798912" cy="400050"/>
           </a:xfrm>
           <a:prstGeom prst="rect">
             <a:avLst/>
@@ -5330,8 +5330,8 @@
         </p:nvSpPr>
         <p:spPr>
           <a:xfrm>
-            <a:off x="1279327" y="5198418"/>
-            <a:ext cx="3694471" cy="284411"/>
+            <a:off x="1279327" y="5188893"/>
+            <a:ext cx="3798912" cy="284411"/>
           </a:xfrm>
           <a:prstGeom prst="rect">
             <a:avLst/>
@@ -5397,7 +5397,7 @@
         </p:nvSpPr>
         <p:spPr>
           <a:xfrm>
-            <a:off x="609600" y="5771704"/>
+            <a:off x="609600" y="5762179"/>
             <a:ext cx="11192256" cy="228600"/>
           </a:xfrm>
           <a:prstGeom prst="rect">
@@ -5549,8 +5549,8 @@
         </p:nvSpPr>
         <p:spPr>
           <a:xfrm>
-            <a:off x="507950" y="176213"/>
-            <a:ext cx="1371404" cy="180975"/>
+            <a:off x="507950" y="180975"/>
+            <a:ext cx="1264837" cy="171450"/>
           </a:xfrm>
           <a:prstGeom prst="rect">
             <a:avLst/>
@@ -5588,8 +5588,8 @@
         </p:nvSpPr>
         <p:spPr>
           <a:xfrm>
-            <a:off x="2137916" y="166688"/>
-            <a:ext cx="1191667" cy="200025"/>
+            <a:off x="2033439" y="166688"/>
+            <a:ext cx="1109844" cy="200025"/>
           </a:xfrm>
           <a:prstGeom prst="rect">
             <a:avLst/>
@@ -5627,8 +5627,8 @@
         </p:nvSpPr>
         <p:spPr>
           <a:xfrm>
-            <a:off x="11208693" y="176213"/>
-            <a:ext cx="484864" cy="180975"/>
+            <a:off x="11244709" y="180975"/>
+            <a:ext cx="448127" cy="171450"/>
           </a:xfrm>
           <a:prstGeom prst="rect">
             <a:avLst/>
@@ -5696,7 +5696,7 @@
         </p:nvSpPr>
         <p:spPr>
           <a:xfrm>
-            <a:off x="609600" y="2240161"/>
+            <a:off x="609600" y="2230636"/>
             <a:ext cx="11192256" cy="200025"/>
           </a:xfrm>
           <a:prstGeom prst="rect">
@@ -5735,12 +5735,12 @@
         </p:nvSpPr>
         <p:spPr>
           <a:xfrm>
-            <a:off x="609600" y="2567136"/>
-            <a:ext cx="3149501" cy="657225"/>
+            <a:off x="609600" y="2557611"/>
+            <a:ext cx="3149501" cy="666750"/>
           </a:xfrm>
           <a:prstGeom prst="roundRect">
             <a:avLst>
-              <a:gd name="adj" fmla="val 9662"/>
+              <a:gd name="adj" fmla="val 9524"/>
             </a:avLst>
           </a:prstGeom>
           <a:solidFill>
@@ -5769,8 +5769,8 @@
         </p:nvSpPr>
         <p:spPr>
           <a:xfrm>
-            <a:off x="812750" y="2681436"/>
-            <a:ext cx="2798064" cy="428625"/>
+            <a:off x="812750" y="2671911"/>
+            <a:ext cx="2798064" cy="438150"/>
           </a:xfrm>
           <a:prstGeom prst="rect">
             <a:avLst/>
@@ -5808,12 +5808,12 @@
         </p:nvSpPr>
         <p:spPr>
           <a:xfrm>
-            <a:off x="4254252" y="2567136"/>
-            <a:ext cx="3149501" cy="657225"/>
+            <a:off x="4248150" y="2557611"/>
+            <a:ext cx="3149501" cy="666750"/>
           </a:xfrm>
           <a:prstGeom prst="roundRect">
             <a:avLst>
-              <a:gd name="adj" fmla="val 9662"/>
+              <a:gd name="adj" fmla="val 9524"/>
             </a:avLst>
           </a:prstGeom>
           <a:solidFill>
@@ -5842,8 +5842,8 @@
         </p:nvSpPr>
         <p:spPr>
           <a:xfrm>
-            <a:off x="4457402" y="2681436"/>
-            <a:ext cx="2798064" cy="428625"/>
+            <a:off x="4451300" y="2671911"/>
+            <a:ext cx="2798064" cy="438150"/>
           </a:xfrm>
           <a:prstGeom prst="rect">
             <a:avLst/>
@@ -5903,8 +5903,8 @@
         </p:nvSpPr>
         <p:spPr>
           <a:xfrm>
-            <a:off x="7683103" y="2781449"/>
-            <a:ext cx="2854080" cy="228600"/>
+            <a:off x="7677001" y="2776686"/>
+            <a:ext cx="2720340" cy="228600"/>
           </a:xfrm>
           <a:prstGeom prst="rect">
             <a:avLst/>
@@ -5946,11 +5946,11 @@
         <p:spPr>
           <a:xfrm>
             <a:off x="609600" y="3503563"/>
-            <a:ext cx="3454301" cy="657225"/>
+            <a:ext cx="3454301" cy="666750"/>
           </a:xfrm>
           <a:prstGeom prst="roundRect">
             <a:avLst>
-              <a:gd name="adj" fmla="val 9662"/>
+              <a:gd name="adj" fmla="val 9524"/>
             </a:avLst>
           </a:prstGeom>
           <a:solidFill>
@@ -5980,7 +5980,7 @@
         <p:spPr>
           <a:xfrm>
             <a:off x="812750" y="3617863"/>
-            <a:ext cx="3108960" cy="428625"/>
+            <a:ext cx="3108960" cy="438150"/>
           </a:xfrm>
           <a:prstGeom prst="rect">
             <a:avLst/>
@@ -6018,12 +6018,12 @@
         </p:nvSpPr>
         <p:spPr>
           <a:xfrm>
-            <a:off x="4559052" y="3503563"/>
-            <a:ext cx="3454301" cy="657225"/>
+            <a:off x="4552950" y="3503563"/>
+            <a:ext cx="3454301" cy="666750"/>
           </a:xfrm>
           <a:prstGeom prst="roundRect">
             <a:avLst>
-              <a:gd name="adj" fmla="val 9662"/>
+              <a:gd name="adj" fmla="val 9524"/>
             </a:avLst>
           </a:prstGeom>
           <a:solidFill>
@@ -6052,8 +6052,8 @@
         </p:nvSpPr>
         <p:spPr>
           <a:xfrm>
-            <a:off x="4762202" y="3617863"/>
-            <a:ext cx="3108960" cy="428625"/>
+            <a:off x="4756100" y="3617863"/>
+            <a:ext cx="3108960" cy="438150"/>
           </a:xfrm>
           <a:prstGeom prst="rect">
             <a:avLst/>
@@ -6113,8 +6113,8 @@
         </p:nvSpPr>
         <p:spPr>
           <a:xfrm>
-            <a:off x="8292703" y="3717875"/>
-            <a:ext cx="1902720" cy="228600"/>
+            <a:off x="8286601" y="3722638"/>
+            <a:ext cx="1787652" cy="228600"/>
           </a:xfrm>
           <a:prstGeom prst="rect">
             <a:avLst/>
@@ -6155,7 +6155,7 @@
         </p:nvSpPr>
         <p:spPr>
           <a:xfrm>
-            <a:off x="609600" y="4414689"/>
+            <a:off x="609600" y="4424214"/>
             <a:ext cx="11192256" cy="228600"/>
           </a:xfrm>
           <a:prstGeom prst="rect">
@@ -6285,8 +6285,8 @@
         </p:nvSpPr>
         <p:spPr>
           <a:xfrm>
-            <a:off x="507950" y="176213"/>
-            <a:ext cx="1371404" cy="180975"/>
+            <a:off x="507950" y="180975"/>
+            <a:ext cx="1264837" cy="171450"/>
           </a:xfrm>
           <a:prstGeom prst="rect">
             <a:avLst/>
@@ -6324,8 +6324,8 @@
         </p:nvSpPr>
         <p:spPr>
           <a:xfrm>
-            <a:off x="2137916" y="166688"/>
-            <a:ext cx="1191667" cy="200025"/>
+            <a:off x="2033439" y="166688"/>
+            <a:ext cx="1109844" cy="200025"/>
           </a:xfrm>
           <a:prstGeom prst="rect">
             <a:avLst/>
@@ -6363,8 +6363,8 @@
         </p:nvSpPr>
         <p:spPr>
           <a:xfrm>
-            <a:off x="11208097" y="176213"/>
-            <a:ext cx="485471" cy="180975"/>
+            <a:off x="11244709" y="180975"/>
+            <a:ext cx="448127" cy="171450"/>
           </a:xfrm>
           <a:prstGeom prst="rect">
             <a:avLst/>
@@ -7915,7 +7915,7 @@
       </p:sp>
       <p:pic>
         <p:nvPicPr>
-          <p:cNvPr id="10" name="Image 0" descr="/var/folders/6c/210dcgxn4gz5sm71vld2cy1h0000gn/T/tmp.LHO6BoqOp1/img/malu.png">    </p:cNvPr>
+          <p:cNvPr id="10" name="Image 0" descr="/var/folders/6c/210dcgxn4gz5sm71vld2cy1h0000gn/T/tmp.kuKuqUEQz8/img/malu.png">    </p:cNvPr>
           <p:cNvPicPr>
             <a:picLocks noChangeAspect="1"/>
           </p:cNvPicPr>
@@ -8014,7 +8014,7 @@
       </p:sp>
       <p:pic>
         <p:nvPicPr>
-          <p:cNvPr id="13" name="Image 1" descr="/var/folders/6c/210dcgxn4gz5sm71vld2cy1h0000gn/T/tmp.LHO6BoqOp1/img/duimian.png">    </p:cNvPr>
+          <p:cNvPr id="13" name="Image 1" descr="/var/folders/6c/210dcgxn4gz5sm71vld2cy1h0000gn/T/tmp.kuKuqUEQz8/img/duimian.png">    </p:cNvPr>
           <p:cNvPicPr>
             <a:picLocks noChangeAspect="1"/>
           </p:cNvPicPr>
@@ -8113,7 +8113,7 @@
       </p:sp>
       <p:pic>
         <p:nvPicPr>
-          <p:cNvPr id="16" name="Image 2" descr="/var/folders/6c/210dcgxn4gz5sm71vld2cy1h0000gn/T/tmp.LHO6BoqOp1/img/huochezhan.png">    </p:cNvPr>
+          <p:cNvPr id="16" name="Image 2" descr="/var/folders/6c/210dcgxn4gz5sm71vld2cy1h0000gn/T/tmp.kuKuqUEQz8/img/huochezhan.png">    </p:cNvPr>
           <p:cNvPicPr>
             <a:picLocks noChangeAspect="1"/>
           </p:cNvPicPr>
@@ -8212,7 +8212,7 @@
       </p:sp>
       <p:pic>
         <p:nvPicPr>
-          <p:cNvPr id="19" name="Image 3" descr="/var/folders/6c/210dcgxn4gz5sm71vld2cy1h0000gn/T/tmp.LHO6BoqOp1/img/lu.png">    </p:cNvPr>
+          <p:cNvPr id="19" name="Image 3" descr="/var/folders/6c/210dcgxn4gz5sm71vld2cy1h0000gn/T/tmp.kuKuqUEQz8/img/lu.png">    </p:cNvPr>
           <p:cNvPicPr>
             <a:picLocks noChangeAspect="1"/>
           </p:cNvPicPr>
@@ -8591,7 +8591,7 @@
       </p:sp>
       <p:pic>
         <p:nvPicPr>
-          <p:cNvPr id="9" name="Image 0" descr="/var/folders/6c/210dcgxn4gz5sm71vld2cy1h0000gn/T/tmp.LHO6BoqOp1/img/ditu.png">    </p:cNvPr>
+          <p:cNvPr id="9" name="Image 0" descr="/var/folders/6c/210dcgxn4gz5sm71vld2cy1h0000gn/T/tmp.kuKuqUEQz8/img/ditu.png">    </p:cNvPr>
           <p:cNvPicPr>
             <a:picLocks noChangeAspect="1"/>
           </p:cNvPicPr>
@@ -9473,8 +9473,8 @@
         </p:nvSpPr>
         <p:spPr>
           <a:xfrm>
-            <a:off x="507950" y="180975"/>
-            <a:ext cx="2386370" cy="171450"/>
+            <a:off x="507950" y="176213"/>
+            <a:ext cx="2644893" cy="180975"/>
           </a:xfrm>
           <a:prstGeom prst="rect">
             <a:avLst/>
@@ -9512,8 +9512,8 @@
         </p:nvSpPr>
         <p:spPr>
           <a:xfrm>
-            <a:off x="3132981" y="166688"/>
-            <a:ext cx="943466" cy="200025"/>
+            <a:off x="3386435" y="166688"/>
+            <a:ext cx="1039710" cy="200025"/>
           </a:xfrm>
           <a:prstGeom prst="rect">
             <a:avLst/>
@@ -9551,8 +9551,8 @@
         </p:nvSpPr>
         <p:spPr>
           <a:xfrm>
-            <a:off x="11244709" y="180975"/>
-            <a:ext cx="448127" cy="171450"/>
+            <a:off x="11207502" y="176213"/>
+            <a:ext cx="486079" cy="180975"/>
           </a:xfrm>
           <a:prstGeom prst="rect">
             <a:avLst/>
@@ -9620,7 +9620,7 @@
         </p:nvSpPr>
         <p:spPr>
           <a:xfrm>
-            <a:off x="609600" y="1608683"/>
+            <a:off x="609600" y="1622971"/>
             <a:ext cx="11192256" cy="200025"/>
           </a:xfrm>
           <a:prstGeom prst="rect">
@@ -9659,12 +9659,12 @@
         </p:nvSpPr>
         <p:spPr>
           <a:xfrm>
-            <a:off x="609600" y="1808708"/>
-            <a:ext cx="10972800" cy="935236"/>
+            <a:off x="609600" y="1822996"/>
+            <a:ext cx="10972800" cy="925711"/>
           </a:xfrm>
           <a:prstGeom prst="roundRect">
             <a:avLst>
-              <a:gd name="adj" fmla="val 6790"/>
+              <a:gd name="adj" fmla="val 6860"/>
             </a:avLst>
           </a:prstGeom>
           <a:solidFill>
@@ -9695,7 +9695,7 @@
         </p:nvSpPr>
         <p:spPr>
           <a:xfrm>
-            <a:off x="822275" y="1970633"/>
+            <a:off x="822275" y="1984921"/>
             <a:ext cx="297841" cy="350490"/>
           </a:xfrm>
           <a:prstGeom prst="rect">
@@ -9737,8 +9737,8 @@
         </p:nvSpPr>
         <p:spPr>
           <a:xfrm>
-            <a:off x="1279327" y="1970633"/>
-            <a:ext cx="5081814" cy="284411"/>
+            <a:off x="1279327" y="1984921"/>
+            <a:ext cx="5280374" cy="284411"/>
           </a:xfrm>
           <a:prstGeom prst="rect">
             <a:avLst/>
@@ -9790,8 +9790,8 @@
         </p:nvSpPr>
         <p:spPr>
           <a:xfrm>
-            <a:off x="1279327" y="2305794"/>
-            <a:ext cx="5081814" cy="276225"/>
+            <a:off x="1279327" y="2320082"/>
+            <a:ext cx="5280374" cy="266700"/>
           </a:xfrm>
           <a:prstGeom prst="rect">
             <a:avLst/>
@@ -9832,12 +9832,12 @@
         </p:nvSpPr>
         <p:spPr>
           <a:xfrm>
-            <a:off x="609600" y="2896344"/>
-            <a:ext cx="10972800" cy="935236"/>
+            <a:off x="609600" y="2901107"/>
+            <a:ext cx="10972800" cy="925711"/>
           </a:xfrm>
           <a:prstGeom prst="roundRect">
             <a:avLst>
-              <a:gd name="adj" fmla="val 6790"/>
+              <a:gd name="adj" fmla="val 6860"/>
             </a:avLst>
           </a:prstGeom>
           <a:solidFill>
@@ -9868,7 +9868,7 @@
         </p:nvSpPr>
         <p:spPr>
           <a:xfrm>
-            <a:off x="822275" y="3058269"/>
+            <a:off x="822275" y="3063032"/>
             <a:ext cx="297841" cy="350490"/>
           </a:xfrm>
           <a:prstGeom prst="rect">
@@ -9910,8 +9910,8 @@
         </p:nvSpPr>
         <p:spPr>
           <a:xfrm>
-            <a:off x="1279327" y="3058269"/>
-            <a:ext cx="3730297" cy="284411"/>
+            <a:off x="1279327" y="3063032"/>
+            <a:ext cx="3786161" cy="284411"/>
           </a:xfrm>
           <a:prstGeom prst="rect">
             <a:avLst/>
@@ -9952,8 +9952,8 @@
         </p:nvSpPr>
         <p:spPr>
           <a:xfrm>
-            <a:off x="1279327" y="3393430"/>
-            <a:ext cx="3730297" cy="276225"/>
+            <a:off x="1279327" y="3398193"/>
+            <a:ext cx="3786161" cy="266700"/>
           </a:xfrm>
           <a:prstGeom prst="rect">
             <a:avLst/>
@@ -9994,12 +9994,12 @@
         </p:nvSpPr>
         <p:spPr>
           <a:xfrm>
-            <a:off x="609600" y="3983980"/>
-            <a:ext cx="10972800" cy="935236"/>
+            <a:off x="609600" y="3979218"/>
+            <a:ext cx="10972800" cy="925711"/>
           </a:xfrm>
           <a:prstGeom prst="roundRect">
             <a:avLst>
-              <a:gd name="adj" fmla="val 6790"/>
+              <a:gd name="adj" fmla="val 6860"/>
             </a:avLst>
           </a:prstGeom>
           <a:solidFill>
@@ -10030,7 +10030,7 @@
         </p:nvSpPr>
         <p:spPr>
           <a:xfrm>
-            <a:off x="822275" y="4145905"/>
+            <a:off x="822275" y="4141143"/>
             <a:ext cx="297841" cy="350490"/>
           </a:xfrm>
           <a:prstGeom prst="rect">
@@ -10072,8 +10072,8 @@
         </p:nvSpPr>
         <p:spPr>
           <a:xfrm>
-            <a:off x="1279327" y="4145905"/>
-            <a:ext cx="7361313" cy="284411"/>
+            <a:off x="1279327" y="4141143"/>
+            <a:ext cx="7593422" cy="284411"/>
           </a:xfrm>
           <a:prstGeom prst="rect">
             <a:avLst/>
@@ -10125,8 +10125,8 @@
         </p:nvSpPr>
         <p:spPr>
           <a:xfrm>
-            <a:off x="1279327" y="4481066"/>
-            <a:ext cx="7361313" cy="276225"/>
+            <a:off x="1279327" y="4476304"/>
+            <a:ext cx="7593422" cy="266700"/>
           </a:xfrm>
           <a:prstGeom prst="rect">
             <a:avLst/>
@@ -10167,7 +10167,7 @@
         </p:nvSpPr>
         <p:spPr>
           <a:xfrm>
-            <a:off x="609600" y="5046166"/>
+            <a:off x="609600" y="5031879"/>
             <a:ext cx="11192256" cy="228600"/>
           </a:xfrm>
           <a:prstGeom prst="rect">
@@ -11423,8 +11423,8 @@
         </p:nvSpPr>
         <p:spPr>
           <a:xfrm>
-            <a:off x="507950" y="180975"/>
-            <a:ext cx="2386370" cy="171450"/>
+            <a:off x="507950" y="176213"/>
+            <a:ext cx="2644893" cy="180975"/>
           </a:xfrm>
           <a:prstGeom prst="rect">
             <a:avLst/>
@@ -11462,8 +11462,8 @@
         </p:nvSpPr>
         <p:spPr>
           <a:xfrm>
-            <a:off x="3132981" y="166688"/>
-            <a:ext cx="1206392" cy="200025"/>
+            <a:off x="3386435" y="166688"/>
+            <a:ext cx="1296260" cy="200025"/>
           </a:xfrm>
           <a:prstGeom prst="rect">
             <a:avLst/>
@@ -11501,8 +11501,8 @@
         </p:nvSpPr>
         <p:spPr>
           <a:xfrm>
-            <a:off x="11244709" y="180975"/>
-            <a:ext cx="448127" cy="171450"/>
+            <a:off x="11183987" y="176213"/>
+            <a:ext cx="510064" cy="180975"/>
           </a:xfrm>
           <a:prstGeom prst="rect">
             <a:avLst/>
@@ -14209,8 +14209,8 @@
         </p:nvSpPr>
         <p:spPr>
           <a:xfrm>
-            <a:off x="507950" y="180975"/>
-            <a:ext cx="1608826" cy="171450"/>
+            <a:off x="507950" y="176213"/>
+            <a:ext cx="1785830" cy="180975"/>
           </a:xfrm>
           <a:prstGeom prst="rect">
             <a:avLst/>
@@ -14248,8 +14248,8 @@
         </p:nvSpPr>
         <p:spPr>
           <a:xfrm>
-            <a:off x="2370683" y="166688"/>
-            <a:ext cx="1116675" cy="200025"/>
+            <a:off x="2544217" y="166688"/>
+            <a:ext cx="1279562" cy="200025"/>
           </a:xfrm>
           <a:prstGeom prst="rect">
             <a:avLst/>
@@ -14287,8 +14287,8 @@
         </p:nvSpPr>
         <p:spPr>
           <a:xfrm>
-            <a:off x="11244709" y="180975"/>
-            <a:ext cx="448127" cy="171450"/>
+            <a:off x="11183541" y="176213"/>
+            <a:ext cx="510519" cy="180975"/>
           </a:xfrm>
           <a:prstGeom prst="rect">
             <a:avLst/>
@@ -14356,7 +14356,7 @@
         </p:nvSpPr>
         <p:spPr>
           <a:xfrm>
-            <a:off x="609600" y="1594396"/>
+            <a:off x="609600" y="1608683"/>
             <a:ext cx="11192256" cy="200025"/>
           </a:xfrm>
           <a:prstGeom prst="rect">
@@ -14395,12 +14395,12 @@
         </p:nvSpPr>
         <p:spPr>
           <a:xfrm>
-            <a:off x="609600" y="1794421"/>
-            <a:ext cx="10972800" cy="944761"/>
+            <a:off x="609600" y="1808708"/>
+            <a:ext cx="10972800" cy="935236"/>
           </a:xfrm>
           <a:prstGeom prst="roundRect">
             <a:avLst>
-              <a:gd name="adj" fmla="val 6721"/>
+              <a:gd name="adj" fmla="val 6790"/>
             </a:avLst>
           </a:prstGeom>
           <a:solidFill>
@@ -14431,7 +14431,7 @@
         </p:nvSpPr>
         <p:spPr>
           <a:xfrm>
-            <a:off x="822275" y="1956346"/>
+            <a:off x="822275" y="1970633"/>
             <a:ext cx="297841" cy="350490"/>
           </a:xfrm>
           <a:prstGeom prst="rect">
@@ -14473,8 +14473,8 @@
         </p:nvSpPr>
         <p:spPr>
           <a:xfrm>
-            <a:off x="1279327" y="1956346"/>
-            <a:ext cx="2901291" cy="284411"/>
+            <a:off x="1279327" y="1970633"/>
+            <a:ext cx="3155109" cy="284411"/>
           </a:xfrm>
           <a:prstGeom prst="rect">
             <a:avLst/>
@@ -14515,8 +14515,8 @@
         </p:nvSpPr>
         <p:spPr>
           <a:xfrm>
-            <a:off x="1279327" y="2291507"/>
-            <a:ext cx="2901291" cy="285750"/>
+            <a:off x="1279327" y="2305794"/>
+            <a:ext cx="3155109" cy="276225"/>
           </a:xfrm>
           <a:prstGeom prst="rect">
             <a:avLst/>
@@ -14557,12 +14557,12 @@
         </p:nvSpPr>
         <p:spPr>
           <a:xfrm>
-            <a:off x="609600" y="2891582"/>
-            <a:ext cx="10972800" cy="944761"/>
+            <a:off x="609600" y="2896344"/>
+            <a:ext cx="10972800" cy="935236"/>
           </a:xfrm>
           <a:prstGeom prst="roundRect">
             <a:avLst>
-              <a:gd name="adj" fmla="val 6721"/>
+              <a:gd name="adj" fmla="val 6790"/>
             </a:avLst>
           </a:prstGeom>
           <a:solidFill>
@@ -14593,7 +14593,7 @@
         </p:nvSpPr>
         <p:spPr>
           <a:xfrm>
-            <a:off x="822275" y="3053507"/>
+            <a:off x="822275" y="3058269"/>
             <a:ext cx="297841" cy="350490"/>
           </a:xfrm>
           <a:prstGeom prst="rect">
@@ -14635,8 +14635,8 @@
         </p:nvSpPr>
         <p:spPr>
           <a:xfrm>
-            <a:off x="1279327" y="3053507"/>
-            <a:ext cx="2901291" cy="284411"/>
+            <a:off x="1279327" y="3058269"/>
+            <a:ext cx="2944859" cy="284411"/>
           </a:xfrm>
           <a:prstGeom prst="rect">
             <a:avLst/>
@@ -14677,8 +14677,8 @@
         </p:nvSpPr>
         <p:spPr>
           <a:xfrm>
-            <a:off x="1279327" y="3388668"/>
-            <a:ext cx="2901291" cy="285750"/>
+            <a:off x="1279327" y="3393430"/>
+            <a:ext cx="2944859" cy="276225"/>
           </a:xfrm>
           <a:prstGeom prst="rect">
             <a:avLst/>
@@ -14719,12 +14719,12 @@
         </p:nvSpPr>
         <p:spPr>
           <a:xfrm>
-            <a:off x="609600" y="3988743"/>
-            <a:ext cx="10972800" cy="944761"/>
+            <a:off x="609600" y="3983980"/>
+            <a:ext cx="10972800" cy="935236"/>
           </a:xfrm>
           <a:prstGeom prst="roundRect">
             <a:avLst>
-              <a:gd name="adj" fmla="val 6721"/>
+              <a:gd name="adj" fmla="val 6790"/>
             </a:avLst>
           </a:prstGeom>
           <a:solidFill>
@@ -14755,7 +14755,7 @@
         </p:nvSpPr>
         <p:spPr>
           <a:xfrm>
-            <a:off x="822275" y="4150668"/>
+            <a:off x="822275" y="4145905"/>
             <a:ext cx="297841" cy="350490"/>
           </a:xfrm>
           <a:prstGeom prst="rect">
@@ -14797,8 +14797,8 @@
         </p:nvSpPr>
         <p:spPr>
           <a:xfrm>
-            <a:off x="1279327" y="4150668"/>
-            <a:ext cx="2486864" cy="284411"/>
+            <a:off x="1279327" y="4145905"/>
+            <a:ext cx="2524208" cy="284411"/>
           </a:xfrm>
           <a:prstGeom prst="rect">
             <a:avLst/>
@@ -14839,8 +14839,8 @@
         </p:nvSpPr>
         <p:spPr>
           <a:xfrm>
-            <a:off x="1279327" y="4485829"/>
-            <a:ext cx="2486864" cy="285750"/>
+            <a:off x="1279327" y="4481066"/>
+            <a:ext cx="2524208" cy="276225"/>
           </a:xfrm>
           <a:prstGeom prst="rect">
             <a:avLst/>
@@ -14881,7 +14881,7 @@
         </p:nvSpPr>
         <p:spPr>
           <a:xfrm>
-            <a:off x="609600" y="5060454"/>
+            <a:off x="609600" y="5046166"/>
             <a:ext cx="11192256" cy="228600"/>
           </a:xfrm>
           <a:prstGeom prst="rect">
@@ -15594,8 +15594,8 @@
         </p:nvSpPr>
         <p:spPr>
           <a:xfrm>
-            <a:off x="507950" y="180975"/>
-            <a:ext cx="1325103" cy="171450"/>
+            <a:off x="507950" y="176213"/>
+            <a:ext cx="1468407" cy="180975"/>
           </a:xfrm>
           <a:prstGeom prst="rect">
             <a:avLst/>
@@ -15633,8 +15633,8 @@
         </p:nvSpPr>
         <p:spPr>
           <a:xfrm>
-            <a:off x="2092523" y="166688"/>
-            <a:ext cx="1394781" cy="200025"/>
+            <a:off x="2233017" y="166688"/>
+            <a:ext cx="1482221" cy="200025"/>
           </a:xfrm>
           <a:prstGeom prst="rect">
             <a:avLst/>
@@ -15672,8 +15672,8 @@
         </p:nvSpPr>
         <p:spPr>
           <a:xfrm>
-            <a:off x="11322397" y="180975"/>
-            <a:ext cx="368885" cy="171450"/>
+            <a:off x="11266438" y="176213"/>
+            <a:ext cx="425964" cy="180975"/>
           </a:xfrm>
           <a:prstGeom prst="rect">
             <a:avLst/>
@@ -16055,8 +16055,8 @@
         </p:nvSpPr>
         <p:spPr>
           <a:xfrm>
-            <a:off x="507950" y="180975"/>
-            <a:ext cx="702097" cy="171450"/>
+            <a:off x="507950" y="176213"/>
+            <a:ext cx="741718" cy="180975"/>
           </a:xfrm>
           <a:prstGeom prst="rect">
             <a:avLst/>
@@ -16094,8 +16094,8 @@
         </p:nvSpPr>
         <p:spPr>
           <a:xfrm>
-            <a:off x="1481733" y="166688"/>
-            <a:ext cx="1959191" cy="200025"/>
+            <a:off x="1520577" y="166688"/>
+            <a:ext cx="2029477" cy="200025"/>
           </a:xfrm>
           <a:prstGeom prst="rect">
             <a:avLst/>
@@ -16133,8 +16133,8 @@
         </p:nvSpPr>
         <p:spPr>
           <a:xfrm>
-            <a:off x="11322397" y="180975"/>
-            <a:ext cx="368885" cy="171450"/>
+            <a:off x="11265843" y="176213"/>
+            <a:ext cx="426571" cy="180975"/>
           </a:xfrm>
           <a:prstGeom prst="rect">
             <a:avLst/>
@@ -16202,7 +16202,7 @@
         </p:nvSpPr>
         <p:spPr>
           <a:xfrm>
-            <a:off x="609600" y="984796"/>
+            <a:off x="609600" y="1181695"/>
             <a:ext cx="11192256" cy="200025"/>
           </a:xfrm>
           <a:prstGeom prst="rect">
@@ -16241,12 +16241,12 @@
         </p:nvSpPr>
         <p:spPr>
           <a:xfrm>
-            <a:off x="609600" y="1184821"/>
-            <a:ext cx="10972800" cy="1149251"/>
+            <a:off x="609600" y="1381720"/>
+            <a:ext cx="10972800" cy="784175"/>
           </a:xfrm>
           <a:prstGeom prst="roundRect">
             <a:avLst>
-              <a:gd name="adj" fmla="val 9946"/>
+              <a:gd name="adj" fmla="val 14576"/>
             </a:avLst>
           </a:prstGeom>
           <a:solidFill>
@@ -16277,8 +16277,8 @@
         </p:nvSpPr>
         <p:spPr>
           <a:xfrm>
-            <a:off x="933450" y="1394371"/>
-            <a:ext cx="10531602" cy="730151"/>
+            <a:off x="933450" y="1591270"/>
+            <a:ext cx="10531602" cy="365075"/>
           </a:xfrm>
           <a:prstGeom prst="rect">
             <a:avLst/>
@@ -16319,7 +16319,7 @@
         </p:nvSpPr>
         <p:spPr>
           <a:xfrm>
-            <a:off x="609600" y="2486471"/>
+            <a:off x="609600" y="2318296"/>
             <a:ext cx="11192256" cy="200025"/>
           </a:xfrm>
           <a:prstGeom prst="rect">
@@ -16361,12 +16361,12 @@
         </p:nvSpPr>
         <p:spPr>
           <a:xfrm>
-            <a:off x="609600" y="2787997"/>
-            <a:ext cx="10972800" cy="935236"/>
+            <a:off x="609600" y="2619821"/>
+            <a:ext cx="10972800" cy="925711"/>
           </a:xfrm>
           <a:prstGeom prst="roundRect">
             <a:avLst>
-              <a:gd name="adj" fmla="val 6790"/>
+              <a:gd name="adj" fmla="val 6860"/>
             </a:avLst>
           </a:prstGeom>
           <a:solidFill>
@@ -16397,7 +16397,7 @@
         </p:nvSpPr>
         <p:spPr>
           <a:xfrm>
-            <a:off x="822275" y="2949922"/>
+            <a:off x="822275" y="2781746"/>
             <a:ext cx="297841" cy="350490"/>
           </a:xfrm>
           <a:prstGeom prst="rect">
@@ -16439,8 +16439,8 @@
         </p:nvSpPr>
         <p:spPr>
           <a:xfrm>
-            <a:off x="1279327" y="2949922"/>
-            <a:ext cx="2762086" cy="284411"/>
+            <a:off x="1279327" y="2781746"/>
+            <a:ext cx="2914650" cy="284411"/>
           </a:xfrm>
           <a:prstGeom prst="rect">
             <a:avLst/>
@@ -16481,8 +16481,8 @@
         </p:nvSpPr>
         <p:spPr>
           <a:xfrm>
-            <a:off x="1279327" y="3285083"/>
-            <a:ext cx="2762086" cy="276225"/>
+            <a:off x="1279327" y="3116907"/>
+            <a:ext cx="2914650" cy="266700"/>
           </a:xfrm>
           <a:prstGeom prst="rect">
             <a:avLst/>
@@ -16523,12 +16523,12 @@
         </p:nvSpPr>
         <p:spPr>
           <a:xfrm>
-            <a:off x="609600" y="3875633"/>
-            <a:ext cx="10972800" cy="935236"/>
+            <a:off x="609600" y="3697932"/>
+            <a:ext cx="10972800" cy="925711"/>
           </a:xfrm>
           <a:prstGeom prst="roundRect">
             <a:avLst>
-              <a:gd name="adj" fmla="val 6790"/>
+              <a:gd name="adj" fmla="val 6860"/>
             </a:avLst>
           </a:prstGeom>
           <a:solidFill>
@@ -16559,7 +16559,7 @@
         </p:nvSpPr>
         <p:spPr>
           <a:xfrm>
-            <a:off x="822275" y="4037558"/>
+            <a:off x="822275" y="3859857"/>
             <a:ext cx="297841" cy="350490"/>
           </a:xfrm>
           <a:prstGeom prst="rect">
@@ -16601,8 +16601,8 @@
         </p:nvSpPr>
         <p:spPr>
           <a:xfrm>
-            <a:off x="1279327" y="4037558"/>
-            <a:ext cx="3085278" cy="284411"/>
+            <a:off x="1279327" y="3859857"/>
+            <a:ext cx="3173173" cy="284411"/>
           </a:xfrm>
           <a:prstGeom prst="rect">
             <a:avLst/>
@@ -16643,8 +16643,8 @@
         </p:nvSpPr>
         <p:spPr>
           <a:xfrm>
-            <a:off x="1279327" y="4372719"/>
-            <a:ext cx="3085278" cy="276225"/>
+            <a:off x="1279327" y="4195018"/>
+            <a:ext cx="3173173" cy="266700"/>
           </a:xfrm>
           <a:prstGeom prst="rect">
             <a:avLst/>
@@ -16685,12 +16685,12 @@
         </p:nvSpPr>
         <p:spPr>
           <a:xfrm>
-            <a:off x="609600" y="4963269"/>
-            <a:ext cx="10972800" cy="935236"/>
+            <a:off x="609600" y="4776043"/>
+            <a:ext cx="10972800" cy="925711"/>
           </a:xfrm>
           <a:prstGeom prst="roundRect">
             <a:avLst>
-              <a:gd name="adj" fmla="val 6790"/>
+              <a:gd name="adj" fmla="val 6860"/>
             </a:avLst>
           </a:prstGeom>
           <a:solidFill>
@@ -16721,7 +16721,7 @@
         </p:nvSpPr>
         <p:spPr>
           <a:xfrm>
-            <a:off x="822275" y="5125194"/>
+            <a:off x="822275" y="4937968"/>
             <a:ext cx="297841" cy="350490"/>
           </a:xfrm>
           <a:prstGeom prst="rect">
@@ -16763,8 +16763,8 @@
         </p:nvSpPr>
         <p:spPr>
           <a:xfrm>
-            <a:off x="1279327" y="5125194"/>
-            <a:ext cx="6034995" cy="284411"/>
+            <a:off x="1279327" y="4937968"/>
+            <a:ext cx="6283348" cy="284411"/>
           </a:xfrm>
           <a:prstGeom prst="rect">
             <a:avLst/>
@@ -16805,8 +16805,8 @@
         </p:nvSpPr>
         <p:spPr>
           <a:xfrm>
-            <a:off x="1279327" y="5460355"/>
-            <a:ext cx="6034995" cy="276225"/>
+            <a:off x="1279327" y="5273129"/>
+            <a:ext cx="6283348" cy="266700"/>
           </a:xfrm>
           <a:prstGeom prst="rect">
             <a:avLst/>
@@ -17148,7 +17148,7 @@
       </p:sp>
       <p:pic>
         <p:nvPicPr>
-          <p:cNvPr id="10" name="Image 0" descr="/var/folders/6c/210dcgxn4gz5sm71vld2cy1h0000gn/T/tmp.LHO6BoqOp1/img/malu.png">    </p:cNvPr>
+          <p:cNvPr id="10" name="Image 0" descr="/var/folders/6c/210dcgxn4gz5sm71vld2cy1h0000gn/T/tmp.kuKuqUEQz8/img/malu.png">    </p:cNvPr>
           <p:cNvPicPr>
             <a:picLocks noChangeAspect="1"/>
           </p:cNvPicPr>
@@ -17328,7 +17328,7 @@
       </p:sp>
       <p:pic>
         <p:nvPicPr>
-          <p:cNvPr id="15" name="Image 1" descr="/var/folders/6c/210dcgxn4gz5sm71vld2cy1h0000gn/T/tmp.LHO6BoqOp1/img/duimian.png">    </p:cNvPr>
+          <p:cNvPr id="15" name="Image 1" descr="/var/folders/6c/210dcgxn4gz5sm71vld2cy1h0000gn/T/tmp.kuKuqUEQz8/img/duimian.png">    </p:cNvPr>
           <p:cNvPicPr>
             <a:picLocks noChangeAspect="1"/>
           </p:cNvPicPr>
@@ -19045,7 +19045,7 @@
       </p:sp>
       <p:pic>
         <p:nvPicPr>
-          <p:cNvPr id="10" name="Image 0" descr="/var/folders/6c/210dcgxn4gz5sm71vld2cy1h0000gn/T/tmp.LHO6BoqOp1/img/huochezhan.png">    </p:cNvPr>
+          <p:cNvPr id="10" name="Image 0" descr="/var/folders/6c/210dcgxn4gz5sm71vld2cy1h0000gn/T/tmp.kuKuqUEQz8/img/huochezhan.png">    </p:cNvPr>
           <p:cNvPicPr>
             <a:picLocks noChangeAspect="1"/>
           </p:cNvPicPr>
@@ -19225,7 +19225,7 @@
       </p:sp>
       <p:pic>
         <p:nvPicPr>
-          <p:cNvPr id="15" name="Image 1" descr="/var/folders/6c/210dcgxn4gz5sm71vld2cy1h0000gn/T/tmp.LHO6BoqOp1/img/lu.png">    </p:cNvPr>
+          <p:cNvPr id="15" name="Image 1" descr="/var/folders/6c/210dcgxn4gz5sm71vld2cy1h0000gn/T/tmp.kuKuqUEQz8/img/lu.png">    </p:cNvPr>
           <p:cNvPicPr>
             <a:picLocks noChangeAspect="1"/>
           </p:cNvPicPr>
